--- a/3-Master_Plan/re_entry/HEROs_and_PASSes/slides/auto/CHAR_sim_input_distributions_AUTO.pptx
+++ b/3-Master_Plan/re_entry/HEROs_and_PASSes/slides/auto/CHAR_sim_input_distributions_AUTO.pptx
@@ -3412,8 +3412,8 @@
         </p:blipFill>
         <p:spPr>
           <a:xfrm>
-            <a:off x="3630168" y="1792428"/>
-            <a:ext cx="8177479" cy="3401159"/>
+            <a:off x="3630168" y="1787179"/>
+            <a:ext cx="8177479" cy="3411657"/>
           </a:xfrm>
           <a:prstGeom prst="rect">
             <a:avLst/>
